--- a/Experiencia de Aprendizaje 2 - Desarrollo de Agente Inteligentes con AI/Clase 2.2/Clase 2.2.pptx
+++ b/Experiencia de Aprendizaje 2 - Desarrollo de Agente Inteligentes con AI/Clase 2.2/Clase 2.2.pptx
@@ -5,7 +5,7 @@
     <p:sldMasterId id="2147483648" r:id="rId1"/>
   </p:sldMasterIdLst>
   <p:notesMasterIdLst>
-    <p:notesMasterId r:id="rId16"/>
+    <p:notesMasterId r:id="rId15"/>
   </p:notesMasterIdLst>
   <p:sldIdLst>
     <p:sldId id="256" r:id="rId2"/>
@@ -13,15 +13,14 @@
     <p:sldId id="279" r:id="rId4"/>
     <p:sldId id="292" r:id="rId5"/>
     <p:sldId id="295" r:id="rId6"/>
-    <p:sldId id="296" r:id="rId7"/>
-    <p:sldId id="301" r:id="rId8"/>
-    <p:sldId id="302" r:id="rId9"/>
-    <p:sldId id="303" r:id="rId10"/>
-    <p:sldId id="304" r:id="rId11"/>
-    <p:sldId id="297" r:id="rId12"/>
-    <p:sldId id="298" r:id="rId13"/>
-    <p:sldId id="299" r:id="rId14"/>
-    <p:sldId id="294" r:id="rId15"/>
+    <p:sldId id="301" r:id="rId7"/>
+    <p:sldId id="302" r:id="rId8"/>
+    <p:sldId id="303" r:id="rId9"/>
+    <p:sldId id="304" r:id="rId10"/>
+    <p:sldId id="297" r:id="rId11"/>
+    <p:sldId id="298" r:id="rId12"/>
+    <p:sldId id="299" r:id="rId13"/>
+    <p:sldId id="294" r:id="rId14"/>
   </p:sldIdLst>
   <p:sldSz cx="12192000" cy="6858000"/>
   <p:notesSz cx="6858000" cy="9144000"/>
@@ -210,7 +209,7 @@
           <a:p>
             <a:fld id="{87BDCB0C-69E9-4911-980B-989A824EA717}" type="datetimeFigureOut">
               <a:rPr lang="es-CL" smtClean="0"/>
-              <a:t>11-04-2026</a:t>
+              <a:t>14-04-2026</a:t>
             </a:fld>
             <a:endParaRPr lang="es-CL"/>
           </a:p>
@@ -601,121 +600,6 @@
         <p:cNvPr id="1" name="">
           <a:extLst>
             <a:ext uri="{FF2B5EF4-FFF2-40B4-BE49-F238E27FC236}">
-              <a16:creationId xmlns:a16="http://schemas.microsoft.com/office/drawing/2014/main" id="{761B607C-25A6-A790-3FC2-B95CC1A3D298}"/>
-            </a:ext>
-          </a:extLst>
-        </p:cNvPr>
-        <p:cNvGrpSpPr/>
-        <p:nvPr/>
-      </p:nvGrpSpPr>
-      <p:grpSpPr>
-        <a:xfrm>
-          <a:off x="0" y="0"/>
-          <a:ext cx="0" cy="0"/>
-          <a:chOff x="0" y="0"/>
-          <a:chExt cx="0" cy="0"/>
-        </a:xfrm>
-      </p:grpSpPr>
-      <p:sp>
-        <p:nvSpPr>
-          <p:cNvPr id="2" name="Marcador de imagen de diapositiva 1">
-            <a:extLst>
-              <a:ext uri="{FF2B5EF4-FFF2-40B4-BE49-F238E27FC236}">
-                <a16:creationId xmlns:a16="http://schemas.microsoft.com/office/drawing/2014/main" id="{B07BDEBE-C433-63E1-BFA2-6A122D0FBF59}"/>
-              </a:ext>
-            </a:extLst>
-          </p:cNvPr>
-          <p:cNvSpPr>
-            <a:spLocks noGrp="1" noRot="1" noChangeAspect="1"/>
-          </p:cNvSpPr>
-          <p:nvPr>
-            <p:ph type="sldImg"/>
-          </p:nvPr>
-        </p:nvSpPr>
-        <p:spPr/>
-        <p:txBody>
-          <a:bodyPr/>
-          <a:lstStyle/>
-          <a:p>
-            <a:endParaRPr lang="es-CL"/>
-          </a:p>
-        </p:txBody>
-      </p:sp>
-      <p:sp>
-        <p:nvSpPr>
-          <p:cNvPr id="3" name="Marcador de notas 2">
-            <a:extLst>
-              <a:ext uri="{FF2B5EF4-FFF2-40B4-BE49-F238E27FC236}">
-                <a16:creationId xmlns:a16="http://schemas.microsoft.com/office/drawing/2014/main" id="{F86CA809-E444-4665-F193-11C454552E54}"/>
-              </a:ext>
-            </a:extLst>
-          </p:cNvPr>
-          <p:cNvSpPr>
-            <a:spLocks noGrp="1"/>
-          </p:cNvSpPr>
-          <p:nvPr>
-            <p:ph type="body" idx="1"/>
-          </p:nvPr>
-        </p:nvSpPr>
-        <p:spPr/>
-        <p:txBody>
-          <a:bodyPr/>
-          <a:lstStyle/>
-          <a:p>
-            <a:endParaRPr lang="es-CL" dirty="0"/>
-          </a:p>
-        </p:txBody>
-      </p:sp>
-      <p:sp>
-        <p:nvSpPr>
-          <p:cNvPr id="4" name="Marcador de número de diapositiva 3">
-            <a:extLst>
-              <a:ext uri="{FF2B5EF4-FFF2-40B4-BE49-F238E27FC236}">
-                <a16:creationId xmlns:a16="http://schemas.microsoft.com/office/drawing/2014/main" id="{2F52ACF2-A68E-5DD1-9EA6-C9C0AE2FA4F0}"/>
-              </a:ext>
-            </a:extLst>
-          </p:cNvPr>
-          <p:cNvSpPr>
-            <a:spLocks noGrp="1"/>
-          </p:cNvSpPr>
-          <p:nvPr>
-            <p:ph type="sldNum" sz="quarter" idx="5"/>
-          </p:nvPr>
-        </p:nvSpPr>
-        <p:spPr/>
-        <p:txBody>
-          <a:bodyPr/>
-          <a:lstStyle/>
-          <a:p>
-            <a:fld id="{2107F482-7FF7-4DD4-AE91-ACA70D5B43D5}" type="slidenum">
-              <a:rPr lang="es-CL" smtClean="0"/>
-              <a:t>12</a:t>
-            </a:fld>
-            <a:endParaRPr lang="es-CL"/>
-          </a:p>
-        </p:txBody>
-      </p:sp>
-    </p:spTree>
-    <p:extLst>
-      <p:ext uri="{BB962C8B-B14F-4D97-AF65-F5344CB8AC3E}">
-        <p14:creationId xmlns:p14="http://schemas.microsoft.com/office/powerpoint/2010/main" val="2229195433"/>
-      </p:ext>
-    </p:extLst>
-  </p:cSld>
-  <p:clrMapOvr>
-    <a:masterClrMapping/>
-  </p:clrMapOvr>
-</p:notes>
-</file>
-
-<file path=ppt/notesSlides/notesSlide11.xml><?xml version="1.0" encoding="utf-8"?>
-<p:notes xmlns:a="http://schemas.openxmlformats.org/drawingml/2006/main" xmlns:r="http://schemas.openxmlformats.org/officeDocument/2006/relationships" xmlns:p="http://schemas.openxmlformats.org/presentationml/2006/main">
-  <p:cSld>
-    <p:spTree>
-      <p:nvGrpSpPr>
-        <p:cNvPr id="1" name="">
-          <a:extLst>
-            <a:ext uri="{FF2B5EF4-FFF2-40B4-BE49-F238E27FC236}">
               <a16:creationId xmlns:a16="http://schemas.microsoft.com/office/drawing/2014/main" id="{AD146B91-BA86-19C1-FE9E-626BFB256A72}"/>
             </a:ext>
           </a:extLst>
@@ -804,7 +688,7 @@
           <a:p>
             <a:fld id="{2107F482-7FF7-4DD4-AE91-ACA70D5B43D5}" type="slidenum">
               <a:rPr lang="es-CL" smtClean="0"/>
-              <a:t>13</a:t>
+              <a:t>12</a:t>
             </a:fld>
             <a:endParaRPr lang="es-CL"/>
           </a:p>
@@ -823,7 +707,7 @@
 </p:notes>
 </file>
 
-<file path=ppt/notesSlides/notesSlide12.xml><?xml version="1.0" encoding="utf-8"?>
+<file path=ppt/notesSlides/notesSlide11.xml><?xml version="1.0" encoding="utf-8"?>
 <p:notes xmlns:a="http://schemas.openxmlformats.org/drawingml/2006/main" xmlns:r="http://schemas.openxmlformats.org/officeDocument/2006/relationships" xmlns:p="http://schemas.openxmlformats.org/presentationml/2006/main">
   <p:cSld>
     <p:spTree>
@@ -919,7 +803,7 @@
           <a:p>
             <a:fld id="{2107F482-7FF7-4DD4-AE91-ACA70D5B43D5}" type="slidenum">
               <a:rPr lang="es-CL" smtClean="0"/>
-              <a:t>14</a:t>
+              <a:t>13</a:t>
             </a:fld>
             <a:endParaRPr lang="es-CL"/>
           </a:p>
@@ -1176,121 +1060,6 @@
         <p:cNvPr id="1" name="">
           <a:extLst>
             <a:ext uri="{FF2B5EF4-FFF2-40B4-BE49-F238E27FC236}">
-              <a16:creationId xmlns:a16="http://schemas.microsoft.com/office/drawing/2014/main" id="{CE85B9FF-3BCC-97DA-F5CA-07B7DFE01EA4}"/>
-            </a:ext>
-          </a:extLst>
-        </p:cNvPr>
-        <p:cNvGrpSpPr/>
-        <p:nvPr/>
-      </p:nvGrpSpPr>
-      <p:grpSpPr>
-        <a:xfrm>
-          <a:off x="0" y="0"/>
-          <a:ext cx="0" cy="0"/>
-          <a:chOff x="0" y="0"/>
-          <a:chExt cx="0" cy="0"/>
-        </a:xfrm>
-      </p:grpSpPr>
-      <p:sp>
-        <p:nvSpPr>
-          <p:cNvPr id="2" name="Marcador de imagen de diapositiva 1">
-            <a:extLst>
-              <a:ext uri="{FF2B5EF4-FFF2-40B4-BE49-F238E27FC236}">
-                <a16:creationId xmlns:a16="http://schemas.microsoft.com/office/drawing/2014/main" id="{5F6823AD-2197-F69A-BE3F-2876E45A93F5}"/>
-              </a:ext>
-            </a:extLst>
-          </p:cNvPr>
-          <p:cNvSpPr>
-            <a:spLocks noGrp="1" noRot="1" noChangeAspect="1"/>
-          </p:cNvSpPr>
-          <p:nvPr>
-            <p:ph type="sldImg"/>
-          </p:nvPr>
-        </p:nvSpPr>
-        <p:spPr/>
-        <p:txBody>
-          <a:bodyPr/>
-          <a:lstStyle/>
-          <a:p>
-            <a:endParaRPr lang="es-CL"/>
-          </a:p>
-        </p:txBody>
-      </p:sp>
-      <p:sp>
-        <p:nvSpPr>
-          <p:cNvPr id="3" name="Marcador de notas 2">
-            <a:extLst>
-              <a:ext uri="{FF2B5EF4-FFF2-40B4-BE49-F238E27FC236}">
-                <a16:creationId xmlns:a16="http://schemas.microsoft.com/office/drawing/2014/main" id="{CB8CEA7F-9304-98E2-F8B2-74802E1F7F01}"/>
-              </a:ext>
-            </a:extLst>
-          </p:cNvPr>
-          <p:cNvSpPr>
-            <a:spLocks noGrp="1"/>
-          </p:cNvSpPr>
-          <p:nvPr>
-            <p:ph type="body" idx="1"/>
-          </p:nvPr>
-        </p:nvSpPr>
-        <p:spPr/>
-        <p:txBody>
-          <a:bodyPr/>
-          <a:lstStyle/>
-          <a:p>
-            <a:endParaRPr lang="es-CL" dirty="0"/>
-          </a:p>
-        </p:txBody>
-      </p:sp>
-      <p:sp>
-        <p:nvSpPr>
-          <p:cNvPr id="4" name="Marcador de número de diapositiva 3">
-            <a:extLst>
-              <a:ext uri="{FF2B5EF4-FFF2-40B4-BE49-F238E27FC236}">
-                <a16:creationId xmlns:a16="http://schemas.microsoft.com/office/drawing/2014/main" id="{8DCFD535-5F96-139A-9371-EE4D09F707D4}"/>
-              </a:ext>
-            </a:extLst>
-          </p:cNvPr>
-          <p:cNvSpPr>
-            <a:spLocks noGrp="1"/>
-          </p:cNvSpPr>
-          <p:nvPr>
-            <p:ph type="sldNum" sz="quarter" idx="5"/>
-          </p:nvPr>
-        </p:nvSpPr>
-        <p:spPr/>
-        <p:txBody>
-          <a:bodyPr/>
-          <a:lstStyle/>
-          <a:p>
-            <a:fld id="{2107F482-7FF7-4DD4-AE91-ACA70D5B43D5}" type="slidenum">
-              <a:rPr lang="es-CL" smtClean="0"/>
-              <a:t>6</a:t>
-            </a:fld>
-            <a:endParaRPr lang="es-CL"/>
-          </a:p>
-        </p:txBody>
-      </p:sp>
-    </p:spTree>
-    <p:extLst>
-      <p:ext uri="{BB962C8B-B14F-4D97-AF65-F5344CB8AC3E}">
-        <p14:creationId xmlns:p14="http://schemas.microsoft.com/office/powerpoint/2010/main" val="3229504386"/>
-      </p:ext>
-    </p:extLst>
-  </p:cSld>
-  <p:clrMapOvr>
-    <a:masterClrMapping/>
-  </p:clrMapOvr>
-</p:notes>
-</file>
-
-<file path=ppt/notesSlides/notesSlide5.xml><?xml version="1.0" encoding="utf-8"?>
-<p:notes xmlns:a="http://schemas.openxmlformats.org/drawingml/2006/main" xmlns:r="http://schemas.openxmlformats.org/officeDocument/2006/relationships" xmlns:p="http://schemas.openxmlformats.org/presentationml/2006/main">
-  <p:cSld>
-    <p:spTree>
-      <p:nvGrpSpPr>
-        <p:cNvPr id="1" name="">
-          <a:extLst>
-            <a:ext uri="{FF2B5EF4-FFF2-40B4-BE49-F238E27FC236}">
               <a16:creationId xmlns:a16="http://schemas.microsoft.com/office/drawing/2014/main" id="{11E405EC-1C95-6887-579E-04BF37F01051}"/>
             </a:ext>
           </a:extLst>
@@ -1379,7 +1148,7 @@
           <a:p>
             <a:fld id="{2107F482-7FF7-4DD4-AE91-ACA70D5B43D5}" type="slidenum">
               <a:rPr lang="es-CL" smtClean="0"/>
-              <a:t>7</a:t>
+              <a:t>6</a:t>
             </a:fld>
             <a:endParaRPr lang="es-CL"/>
           </a:p>
@@ -1398,7 +1167,7 @@
 </p:notes>
 </file>
 
-<file path=ppt/notesSlides/notesSlide6.xml><?xml version="1.0" encoding="utf-8"?>
+<file path=ppt/notesSlides/notesSlide5.xml><?xml version="1.0" encoding="utf-8"?>
 <p:notes xmlns:a="http://schemas.openxmlformats.org/drawingml/2006/main" xmlns:r="http://schemas.openxmlformats.org/officeDocument/2006/relationships" xmlns:p="http://schemas.openxmlformats.org/presentationml/2006/main">
   <p:cSld>
     <p:spTree>
@@ -1494,7 +1263,7 @@
           <a:p>
             <a:fld id="{2107F482-7FF7-4DD4-AE91-ACA70D5B43D5}" type="slidenum">
               <a:rPr lang="es-CL" smtClean="0"/>
-              <a:t>8</a:t>
+              <a:t>7</a:t>
             </a:fld>
             <a:endParaRPr lang="es-CL"/>
           </a:p>
@@ -1513,7 +1282,7 @@
 </p:notes>
 </file>
 
-<file path=ppt/notesSlides/notesSlide7.xml><?xml version="1.0" encoding="utf-8"?>
+<file path=ppt/notesSlides/notesSlide6.xml><?xml version="1.0" encoding="utf-8"?>
 <p:notes xmlns:a="http://schemas.openxmlformats.org/drawingml/2006/main" xmlns:r="http://schemas.openxmlformats.org/officeDocument/2006/relationships" xmlns:p="http://schemas.openxmlformats.org/presentationml/2006/main">
   <p:cSld>
     <p:spTree>
@@ -1609,7 +1378,7 @@
           <a:p>
             <a:fld id="{2107F482-7FF7-4DD4-AE91-ACA70D5B43D5}" type="slidenum">
               <a:rPr lang="es-CL" smtClean="0"/>
-              <a:t>9</a:t>
+              <a:t>8</a:t>
             </a:fld>
             <a:endParaRPr lang="es-CL"/>
           </a:p>
@@ -1628,7 +1397,7 @@
 </p:notes>
 </file>
 
-<file path=ppt/notesSlides/notesSlide8.xml><?xml version="1.0" encoding="utf-8"?>
+<file path=ppt/notesSlides/notesSlide7.xml><?xml version="1.0" encoding="utf-8"?>
 <p:notes xmlns:a="http://schemas.openxmlformats.org/drawingml/2006/main" xmlns:r="http://schemas.openxmlformats.org/officeDocument/2006/relationships" xmlns:p="http://schemas.openxmlformats.org/presentationml/2006/main">
   <p:cSld>
     <p:spTree>
@@ -1724,7 +1493,7 @@
           <a:p>
             <a:fld id="{2107F482-7FF7-4DD4-AE91-ACA70D5B43D5}" type="slidenum">
               <a:rPr lang="es-CL" smtClean="0"/>
-              <a:t>10</a:t>
+              <a:t>9</a:t>
             </a:fld>
             <a:endParaRPr lang="es-CL"/>
           </a:p>
@@ -1743,7 +1512,7 @@
 </p:notes>
 </file>
 
-<file path=ppt/notesSlides/notesSlide9.xml><?xml version="1.0" encoding="utf-8"?>
+<file path=ppt/notesSlides/notesSlide8.xml><?xml version="1.0" encoding="utf-8"?>
 <p:notes xmlns:a="http://schemas.openxmlformats.org/drawingml/2006/main" xmlns:r="http://schemas.openxmlformats.org/officeDocument/2006/relationships" xmlns:p="http://schemas.openxmlformats.org/presentationml/2006/main">
   <p:cSld>
     <p:spTree>
@@ -1839,7 +1608,7 @@
           <a:p>
             <a:fld id="{2107F482-7FF7-4DD4-AE91-ACA70D5B43D5}" type="slidenum">
               <a:rPr lang="es-CL" smtClean="0"/>
-              <a:t>11</a:t>
+              <a:t>10</a:t>
             </a:fld>
             <a:endParaRPr lang="es-CL"/>
           </a:p>
@@ -1849,6 +1618,121 @@
     <p:extLst>
       <p:ext uri="{BB962C8B-B14F-4D97-AF65-F5344CB8AC3E}">
         <p14:creationId xmlns:p14="http://schemas.microsoft.com/office/powerpoint/2010/main" val="1691337182"/>
+      </p:ext>
+    </p:extLst>
+  </p:cSld>
+  <p:clrMapOvr>
+    <a:masterClrMapping/>
+  </p:clrMapOvr>
+</p:notes>
+</file>
+
+<file path=ppt/notesSlides/notesSlide9.xml><?xml version="1.0" encoding="utf-8"?>
+<p:notes xmlns:a="http://schemas.openxmlformats.org/drawingml/2006/main" xmlns:r="http://schemas.openxmlformats.org/officeDocument/2006/relationships" xmlns:p="http://schemas.openxmlformats.org/presentationml/2006/main">
+  <p:cSld>
+    <p:spTree>
+      <p:nvGrpSpPr>
+        <p:cNvPr id="1" name="">
+          <a:extLst>
+            <a:ext uri="{FF2B5EF4-FFF2-40B4-BE49-F238E27FC236}">
+              <a16:creationId xmlns:a16="http://schemas.microsoft.com/office/drawing/2014/main" id="{761B607C-25A6-A790-3FC2-B95CC1A3D298}"/>
+            </a:ext>
+          </a:extLst>
+        </p:cNvPr>
+        <p:cNvGrpSpPr/>
+        <p:nvPr/>
+      </p:nvGrpSpPr>
+      <p:grpSpPr>
+        <a:xfrm>
+          <a:off x="0" y="0"/>
+          <a:ext cx="0" cy="0"/>
+          <a:chOff x="0" y="0"/>
+          <a:chExt cx="0" cy="0"/>
+        </a:xfrm>
+      </p:grpSpPr>
+      <p:sp>
+        <p:nvSpPr>
+          <p:cNvPr id="2" name="Marcador de imagen de diapositiva 1">
+            <a:extLst>
+              <a:ext uri="{FF2B5EF4-FFF2-40B4-BE49-F238E27FC236}">
+                <a16:creationId xmlns:a16="http://schemas.microsoft.com/office/drawing/2014/main" id="{B07BDEBE-C433-63E1-BFA2-6A122D0FBF59}"/>
+              </a:ext>
+            </a:extLst>
+          </p:cNvPr>
+          <p:cNvSpPr>
+            <a:spLocks noGrp="1" noRot="1" noChangeAspect="1"/>
+          </p:cNvSpPr>
+          <p:nvPr>
+            <p:ph type="sldImg"/>
+          </p:nvPr>
+        </p:nvSpPr>
+        <p:spPr/>
+        <p:txBody>
+          <a:bodyPr/>
+          <a:lstStyle/>
+          <a:p>
+            <a:endParaRPr lang="es-CL"/>
+          </a:p>
+        </p:txBody>
+      </p:sp>
+      <p:sp>
+        <p:nvSpPr>
+          <p:cNvPr id="3" name="Marcador de notas 2">
+            <a:extLst>
+              <a:ext uri="{FF2B5EF4-FFF2-40B4-BE49-F238E27FC236}">
+                <a16:creationId xmlns:a16="http://schemas.microsoft.com/office/drawing/2014/main" id="{F86CA809-E444-4665-F193-11C454552E54}"/>
+              </a:ext>
+            </a:extLst>
+          </p:cNvPr>
+          <p:cNvSpPr>
+            <a:spLocks noGrp="1"/>
+          </p:cNvSpPr>
+          <p:nvPr>
+            <p:ph type="body" idx="1"/>
+          </p:nvPr>
+        </p:nvSpPr>
+        <p:spPr/>
+        <p:txBody>
+          <a:bodyPr/>
+          <a:lstStyle/>
+          <a:p>
+            <a:endParaRPr lang="es-CL" dirty="0"/>
+          </a:p>
+        </p:txBody>
+      </p:sp>
+      <p:sp>
+        <p:nvSpPr>
+          <p:cNvPr id="4" name="Marcador de número de diapositiva 3">
+            <a:extLst>
+              <a:ext uri="{FF2B5EF4-FFF2-40B4-BE49-F238E27FC236}">
+                <a16:creationId xmlns:a16="http://schemas.microsoft.com/office/drawing/2014/main" id="{2F52ACF2-A68E-5DD1-9EA6-C9C0AE2FA4F0}"/>
+              </a:ext>
+            </a:extLst>
+          </p:cNvPr>
+          <p:cNvSpPr>
+            <a:spLocks noGrp="1"/>
+          </p:cNvSpPr>
+          <p:nvPr>
+            <p:ph type="sldNum" sz="quarter" idx="5"/>
+          </p:nvPr>
+        </p:nvSpPr>
+        <p:spPr/>
+        <p:txBody>
+          <a:bodyPr/>
+          <a:lstStyle/>
+          <a:p>
+            <a:fld id="{2107F482-7FF7-4DD4-AE91-ACA70D5B43D5}" type="slidenum">
+              <a:rPr lang="es-CL" smtClean="0"/>
+              <a:t>11</a:t>
+            </a:fld>
+            <a:endParaRPr lang="es-CL"/>
+          </a:p>
+        </p:txBody>
+      </p:sp>
+    </p:spTree>
+    <p:extLst>
+      <p:ext uri="{BB962C8B-B14F-4D97-AF65-F5344CB8AC3E}">
+        <p14:creationId xmlns:p14="http://schemas.microsoft.com/office/powerpoint/2010/main" val="2229195433"/>
       </p:ext>
     </p:extLst>
   </p:cSld>
@@ -2007,7 +1891,7 @@
           <a:p>
             <a:fld id="{E8BDA46D-A1A7-4D05-A86A-5A57D57622A5}" type="datetimeFigureOut">
               <a:rPr lang="es-CL" smtClean="0"/>
-              <a:t>11-04-2026</a:t>
+              <a:t>14-04-2026</a:t>
             </a:fld>
             <a:endParaRPr lang="es-CL"/>
           </a:p>
@@ -2207,7 +2091,7 @@
           <a:p>
             <a:fld id="{E8BDA46D-A1A7-4D05-A86A-5A57D57622A5}" type="datetimeFigureOut">
               <a:rPr lang="es-CL" smtClean="0"/>
-              <a:t>11-04-2026</a:t>
+              <a:t>14-04-2026</a:t>
             </a:fld>
             <a:endParaRPr lang="es-CL"/>
           </a:p>
@@ -2417,7 +2301,7 @@
           <a:p>
             <a:fld id="{E8BDA46D-A1A7-4D05-A86A-5A57D57622A5}" type="datetimeFigureOut">
               <a:rPr lang="es-CL" smtClean="0"/>
-              <a:t>11-04-2026</a:t>
+              <a:t>14-04-2026</a:t>
             </a:fld>
             <a:endParaRPr lang="es-CL"/>
           </a:p>
@@ -2617,7 +2501,7 @@
           <a:p>
             <a:fld id="{E8BDA46D-A1A7-4D05-A86A-5A57D57622A5}" type="datetimeFigureOut">
               <a:rPr lang="es-CL" smtClean="0"/>
-              <a:t>11-04-2026</a:t>
+              <a:t>14-04-2026</a:t>
             </a:fld>
             <a:endParaRPr lang="es-CL"/>
           </a:p>
@@ -2893,7 +2777,7 @@
           <a:p>
             <a:fld id="{E8BDA46D-A1A7-4D05-A86A-5A57D57622A5}" type="datetimeFigureOut">
               <a:rPr lang="es-CL" smtClean="0"/>
-              <a:t>11-04-2026</a:t>
+              <a:t>14-04-2026</a:t>
             </a:fld>
             <a:endParaRPr lang="es-CL"/>
           </a:p>
@@ -3161,7 +3045,7 @@
           <a:p>
             <a:fld id="{E8BDA46D-A1A7-4D05-A86A-5A57D57622A5}" type="datetimeFigureOut">
               <a:rPr lang="es-CL" smtClean="0"/>
-              <a:t>11-04-2026</a:t>
+              <a:t>14-04-2026</a:t>
             </a:fld>
             <a:endParaRPr lang="es-CL"/>
           </a:p>
@@ -3576,7 +3460,7 @@
           <a:p>
             <a:fld id="{E8BDA46D-A1A7-4D05-A86A-5A57D57622A5}" type="datetimeFigureOut">
               <a:rPr lang="es-CL" smtClean="0"/>
-              <a:t>11-04-2026</a:t>
+              <a:t>14-04-2026</a:t>
             </a:fld>
             <a:endParaRPr lang="es-CL"/>
           </a:p>
@@ -3718,7 +3602,7 @@
           <a:p>
             <a:fld id="{E8BDA46D-A1A7-4D05-A86A-5A57D57622A5}" type="datetimeFigureOut">
               <a:rPr lang="es-CL" smtClean="0"/>
-              <a:t>11-04-2026</a:t>
+              <a:t>14-04-2026</a:t>
             </a:fld>
             <a:endParaRPr lang="es-CL"/>
           </a:p>
@@ -3831,7 +3715,7 @@
           <a:p>
             <a:fld id="{E8BDA46D-A1A7-4D05-A86A-5A57D57622A5}" type="datetimeFigureOut">
               <a:rPr lang="es-CL" smtClean="0"/>
-              <a:t>11-04-2026</a:t>
+              <a:t>14-04-2026</a:t>
             </a:fld>
             <a:endParaRPr lang="es-CL"/>
           </a:p>
@@ -4144,7 +4028,7 @@
           <a:p>
             <a:fld id="{E8BDA46D-A1A7-4D05-A86A-5A57D57622A5}" type="datetimeFigureOut">
               <a:rPr lang="es-CL" smtClean="0"/>
-              <a:t>11-04-2026</a:t>
+              <a:t>14-04-2026</a:t>
             </a:fld>
             <a:endParaRPr lang="es-CL"/>
           </a:p>
@@ -4433,7 +4317,7 @@
           <a:p>
             <a:fld id="{E8BDA46D-A1A7-4D05-A86A-5A57D57622A5}" type="datetimeFigureOut">
               <a:rPr lang="es-CL" smtClean="0"/>
-              <a:t>11-04-2026</a:t>
+              <a:t>14-04-2026</a:t>
             </a:fld>
             <a:endParaRPr lang="es-CL"/>
           </a:p>
@@ -4676,7 +4560,7 @@
           <a:p>
             <a:fld id="{E8BDA46D-A1A7-4D05-A86A-5A57D57622A5}" type="datetimeFigureOut">
               <a:rPr lang="es-CL" smtClean="0"/>
-              <a:t>11-04-2026</a:t>
+              <a:t>14-04-2026</a:t>
             </a:fld>
             <a:endParaRPr lang="es-CL"/>
           </a:p>
@@ -5440,412 +5324,6 @@
         <p:cNvPr id="1" name="">
           <a:extLst>
             <a:ext uri="{FF2B5EF4-FFF2-40B4-BE49-F238E27FC236}">
-              <a16:creationId xmlns:a16="http://schemas.microsoft.com/office/drawing/2014/main" id="{7EDACDB2-0715-D0C9-E196-76271EA91E60}"/>
-            </a:ext>
-          </a:extLst>
-        </p:cNvPr>
-        <p:cNvGrpSpPr/>
-        <p:nvPr/>
-      </p:nvGrpSpPr>
-      <p:grpSpPr>
-        <a:xfrm>
-          <a:off x="0" y="0"/>
-          <a:ext cx="0" cy="0"/>
-          <a:chOff x="0" y="0"/>
-          <a:chExt cx="0" cy="0"/>
-        </a:xfrm>
-      </p:grpSpPr>
-      <p:pic>
-        <p:nvPicPr>
-          <p:cNvPr id="4" name="Picture 2" descr="Duoc UC - Learn Chile">
-            <a:extLst>
-              <a:ext uri="{FF2B5EF4-FFF2-40B4-BE49-F238E27FC236}">
-                <a16:creationId xmlns:a16="http://schemas.microsoft.com/office/drawing/2014/main" id="{5100A106-BEF5-89F1-E6D9-15F9911808F9}"/>
-              </a:ext>
-            </a:extLst>
-          </p:cNvPr>
-          <p:cNvPicPr>
-            <a:picLocks noChangeAspect="1" noChangeArrowheads="1"/>
-          </p:cNvPicPr>
-          <p:nvPr/>
-        </p:nvPicPr>
-        <p:blipFill>
-          <a:blip r:embed="rId3">
-            <a:extLst>
-              <a:ext uri="{28A0092B-C50C-407E-A947-70E740481C1C}">
-                <a14:useLocalDpi xmlns:a14="http://schemas.microsoft.com/office/drawing/2010/main" val="0"/>
-              </a:ext>
-            </a:extLst>
-          </a:blip>
-          <a:srcRect/>
-          <a:stretch>
-            <a:fillRect/>
-          </a:stretch>
-        </p:blipFill>
-        <p:spPr bwMode="auto">
-          <a:xfrm>
-            <a:off x="11135913" y="30480"/>
-            <a:ext cx="974807" cy="825402"/>
-          </a:xfrm>
-          <a:prstGeom prst="rect">
-            <a:avLst/>
-          </a:prstGeom>
-          <a:noFill/>
-          <a:extLst>
-            <a:ext uri="{909E8E84-426E-40DD-AFC4-6F175D3DCCD1}">
-              <a14:hiddenFill xmlns:a14="http://schemas.microsoft.com/office/drawing/2010/main">
-                <a:solidFill>
-                  <a:srgbClr val="FFFFFF"/>
-                </a:solidFill>
-              </a14:hiddenFill>
-            </a:ext>
-          </a:extLst>
-        </p:spPr>
-      </p:pic>
-      <p:sp>
-        <p:nvSpPr>
-          <p:cNvPr id="2" name="Título 1">
-            <a:extLst>
-              <a:ext uri="{FF2B5EF4-FFF2-40B4-BE49-F238E27FC236}">
-                <a16:creationId xmlns:a16="http://schemas.microsoft.com/office/drawing/2014/main" id="{1D8B0CF6-DF6E-A854-3976-A864470831FE}"/>
-              </a:ext>
-            </a:extLst>
-          </p:cNvPr>
-          <p:cNvSpPr txBox="1">
-            <a:spLocks/>
-          </p:cNvSpPr>
-          <p:nvPr/>
-        </p:nvSpPr>
-        <p:spPr>
-          <a:xfrm>
-            <a:off x="989606" y="284087"/>
-            <a:ext cx="9768840" cy="1325563"/>
-          </a:xfrm>
-          <a:prstGeom prst="rect">
-            <a:avLst/>
-          </a:prstGeom>
-        </p:spPr>
-        <p:txBody>
-          <a:bodyPr vert="horz" lIns="91440" tIns="45720" rIns="91440" bIns="45720" rtlCol="0" anchor="ctr">
-            <a:normAutofit/>
-          </a:bodyPr>
-          <a:lstStyle>
-            <a:lvl1pPr algn="l" defTabSz="914400" rtl="0" eaLnBrk="1" latinLnBrk="0" hangingPunct="1">
-              <a:lnSpc>
-                <a:spcPct val="90000"/>
-              </a:lnSpc>
-              <a:spcBef>
-                <a:spcPct val="0"/>
-              </a:spcBef>
-              <a:buNone/>
-              <a:defRPr sz="4400" kern="1200">
-                <a:solidFill>
-                  <a:schemeClr val="tx1"/>
-                </a:solidFill>
-                <a:latin typeface="+mj-lt"/>
-                <a:ea typeface="+mj-ea"/>
-                <a:cs typeface="+mj-cs"/>
-              </a:defRPr>
-            </a:lvl1pPr>
-          </a:lstStyle>
-          <a:p>
-            <a:endParaRPr lang="es-CL" sz="3200" i="1" dirty="0"/>
-          </a:p>
-        </p:txBody>
-      </p:sp>
-      <p:sp>
-        <p:nvSpPr>
-          <p:cNvPr id="7" name="Título 1">
-            <a:extLst>
-              <a:ext uri="{FF2B5EF4-FFF2-40B4-BE49-F238E27FC236}">
-                <a16:creationId xmlns:a16="http://schemas.microsoft.com/office/drawing/2014/main" id="{08CF7494-419A-F5DB-DF38-B76C920C90A9}"/>
-              </a:ext>
-            </a:extLst>
-          </p:cNvPr>
-          <p:cNvSpPr txBox="1">
-            <a:spLocks/>
-          </p:cNvSpPr>
-          <p:nvPr/>
-        </p:nvSpPr>
-        <p:spPr>
-          <a:xfrm>
-            <a:off x="431580" y="95769"/>
-            <a:ext cx="10515600" cy="1325563"/>
-          </a:xfrm>
-          <a:prstGeom prst="rect">
-            <a:avLst/>
-          </a:prstGeom>
-        </p:spPr>
-        <p:txBody>
-          <a:bodyPr vert="horz" lIns="91440" tIns="45720" rIns="91440" bIns="45720" rtlCol="0" anchor="ctr">
-            <a:normAutofit/>
-          </a:bodyPr>
-          <a:lstStyle>
-            <a:lvl1pPr algn="l" defTabSz="914400" rtl="0" eaLnBrk="1" latinLnBrk="0" hangingPunct="1">
-              <a:lnSpc>
-                <a:spcPct val="90000"/>
-              </a:lnSpc>
-              <a:spcBef>
-                <a:spcPct val="0"/>
-              </a:spcBef>
-              <a:buNone/>
-              <a:defRPr sz="4400" kern="1200">
-                <a:solidFill>
-                  <a:schemeClr val="tx1"/>
-                </a:solidFill>
-                <a:latin typeface="+mj-lt"/>
-                <a:ea typeface="+mj-ea"/>
-                <a:cs typeface="+mj-cs"/>
-              </a:defRPr>
-            </a:lvl1pPr>
-          </a:lstStyle>
-          <a:p>
-            <a:r>
-              <a:rPr lang="es-CL" b="1" i="1" dirty="0"/>
-              <a:t>Episódica</a:t>
-            </a:r>
-            <a:r>
-              <a:rPr lang="es-MX" b="1" i="1" dirty="0"/>
-              <a:t>: </a:t>
-            </a:r>
-            <a:r>
-              <a:rPr lang="es-MX" i="1" dirty="0"/>
-              <a:t>Acciones o episodios pasadas</a:t>
-            </a:r>
-            <a:r>
-              <a:rPr lang="es-MX" b="1" i="1" dirty="0"/>
-              <a:t>.</a:t>
-            </a:r>
-            <a:endParaRPr lang="es-CL" i="1" dirty="0"/>
-          </a:p>
-        </p:txBody>
-      </p:sp>
-      <p:sp>
-        <p:nvSpPr>
-          <p:cNvPr id="9" name="Título 1">
-            <a:extLst>
-              <a:ext uri="{FF2B5EF4-FFF2-40B4-BE49-F238E27FC236}">
-                <a16:creationId xmlns:a16="http://schemas.microsoft.com/office/drawing/2014/main" id="{2057300D-F732-FA3D-19FB-FA79E6E7FC74}"/>
-              </a:ext>
-            </a:extLst>
-          </p:cNvPr>
-          <p:cNvSpPr txBox="1">
-            <a:spLocks/>
-          </p:cNvSpPr>
-          <p:nvPr/>
-        </p:nvSpPr>
-        <p:spPr>
-          <a:xfrm>
-            <a:off x="8170535" y="3249774"/>
-            <a:ext cx="3940185" cy="2803696"/>
-          </a:xfrm>
-          <a:prstGeom prst="rect">
-            <a:avLst/>
-          </a:prstGeom>
-        </p:spPr>
-        <p:txBody>
-          <a:bodyPr vert="horz" lIns="91440" tIns="45720" rIns="91440" bIns="45720" rtlCol="0" anchor="ctr">
-            <a:normAutofit/>
-          </a:bodyPr>
-          <a:lstStyle>
-            <a:lvl1pPr algn="l" defTabSz="914400" rtl="0" eaLnBrk="1" latinLnBrk="0" hangingPunct="1">
-              <a:lnSpc>
-                <a:spcPct val="90000"/>
-              </a:lnSpc>
-              <a:spcBef>
-                <a:spcPct val="0"/>
-              </a:spcBef>
-              <a:buNone/>
-              <a:defRPr sz="4400" kern="1200">
-                <a:solidFill>
-                  <a:schemeClr val="tx1"/>
-                </a:solidFill>
-                <a:latin typeface="+mj-lt"/>
-                <a:ea typeface="+mj-ea"/>
-                <a:cs typeface="+mj-cs"/>
-              </a:defRPr>
-            </a:lvl1pPr>
-          </a:lstStyle>
-          <a:p>
-            <a:pPr algn="ctr"/>
-            <a:endParaRPr lang="es-MX" i="1" dirty="0"/>
-          </a:p>
-        </p:txBody>
-      </p:sp>
-      <p:sp>
-        <p:nvSpPr>
-          <p:cNvPr id="10" name="CuadroTexto 9">
-            <a:extLst>
-              <a:ext uri="{FF2B5EF4-FFF2-40B4-BE49-F238E27FC236}">
-                <a16:creationId xmlns:a16="http://schemas.microsoft.com/office/drawing/2014/main" id="{BC00C1A3-9649-2EB8-229E-2EE2444EAAED}"/>
-              </a:ext>
-            </a:extLst>
-          </p:cNvPr>
-          <p:cNvSpPr txBox="1"/>
-          <p:nvPr/>
-        </p:nvSpPr>
-        <p:spPr>
-          <a:xfrm>
-            <a:off x="431580" y="1518802"/>
-            <a:ext cx="5548978" cy="4093428"/>
-          </a:xfrm>
-          <a:prstGeom prst="rect">
-            <a:avLst/>
-          </a:prstGeom>
-          <a:noFill/>
-        </p:spPr>
-        <p:txBody>
-          <a:bodyPr wrap="square">
-            <a:spAutoFit/>
-          </a:bodyPr>
-          <a:lstStyle/>
-          <a:p>
-            <a:r>
-              <a:rPr lang="es-MX" sz="2000" i="1" dirty="0">
-                <a:latin typeface="+mj-lt"/>
-              </a:rPr>
-              <a:t>Son las reglas utilizadas para realizar tareas. En los humanos, la memoria procedimental es como el conocimiento interiorizado de cómo ejecutar acciones, como montar en bicicleta mediante habilidades motoras básicas y equilibrio. La memoria episódica, en cambio, implica recordar experiencias específicas, como la primera vez que se montó en bicicleta sin </a:t>
-            </a:r>
-            <a:r>
-              <a:rPr lang="es-MX" sz="2000" i="1" dirty="0" err="1">
-                <a:latin typeface="+mj-lt"/>
-              </a:rPr>
-              <a:t>ruedines</a:t>
-            </a:r>
-            <a:r>
-              <a:rPr lang="es-MX" sz="2000" i="1" dirty="0">
-                <a:latin typeface="+mj-lt"/>
-              </a:rPr>
-              <a:t> o un paseo memorable por una ruta pintoresca. En el caso de los agentes de IA, la memoria procedimental es una combinación de los pesos del modelo, el código del agente y el </a:t>
-            </a:r>
-            <a:r>
-              <a:rPr lang="es-MX" sz="2000" i="1" dirty="0" err="1">
-                <a:latin typeface="+mj-lt"/>
-              </a:rPr>
-              <a:t>prompt</a:t>
-            </a:r>
-            <a:r>
-              <a:rPr lang="es-MX" sz="2000" i="1" dirty="0">
-                <a:latin typeface="+mj-lt"/>
-              </a:rPr>
-              <a:t> del agente, que en conjunto determinan la funcionalidad del agente.</a:t>
-            </a:r>
-            <a:endParaRPr lang="es-CL" sz="2000" i="1" dirty="0">
-              <a:latin typeface="+mj-lt"/>
-            </a:endParaRPr>
-          </a:p>
-        </p:txBody>
-      </p:sp>
-      <p:sp>
-        <p:nvSpPr>
-          <p:cNvPr id="11" name="Título 1">
-            <a:extLst>
-              <a:ext uri="{FF2B5EF4-FFF2-40B4-BE49-F238E27FC236}">
-                <a16:creationId xmlns:a16="http://schemas.microsoft.com/office/drawing/2014/main" id="{3E3ECE98-2E3B-38D2-129C-552BF7766BA2}"/>
-              </a:ext>
-            </a:extLst>
-          </p:cNvPr>
-          <p:cNvSpPr txBox="1">
-            <a:spLocks/>
-          </p:cNvSpPr>
-          <p:nvPr/>
-        </p:nvSpPr>
-        <p:spPr>
-          <a:xfrm>
-            <a:off x="-904099" y="6308112"/>
-            <a:ext cx="7549374" cy="454119"/>
-          </a:xfrm>
-          <a:prstGeom prst="rect">
-            <a:avLst/>
-          </a:prstGeom>
-        </p:spPr>
-        <p:txBody>
-          <a:bodyPr vert="horz" lIns="91440" tIns="45720" rIns="91440" bIns="45720" rtlCol="0" anchor="ctr">
-            <a:normAutofit/>
-          </a:bodyPr>
-          <a:lstStyle>
-            <a:lvl1pPr algn="l" defTabSz="914400" rtl="0" eaLnBrk="1" latinLnBrk="0" hangingPunct="1">
-              <a:lnSpc>
-                <a:spcPct val="90000"/>
-              </a:lnSpc>
-              <a:spcBef>
-                <a:spcPct val="0"/>
-              </a:spcBef>
-              <a:buNone/>
-              <a:defRPr sz="4400" kern="1200">
-                <a:solidFill>
-                  <a:schemeClr val="tx1"/>
-                </a:solidFill>
-                <a:latin typeface="+mj-lt"/>
-                <a:ea typeface="+mj-ea"/>
-                <a:cs typeface="+mj-cs"/>
-              </a:defRPr>
-            </a:lvl1pPr>
-          </a:lstStyle>
-          <a:p>
-            <a:pPr algn="ctr"/>
-            <a:r>
-              <a:rPr lang="es-MX" sz="1600" b="1" i="1" dirty="0"/>
-              <a:t>Nota: </a:t>
-            </a:r>
-            <a:r>
-              <a:rPr lang="es-CL" sz="1600" i="1" dirty="0"/>
-              <a:t>https://docs.langchain.com/oss/python/langgraph/memory</a:t>
-            </a:r>
-          </a:p>
-        </p:txBody>
-      </p:sp>
-      <p:pic>
-        <p:nvPicPr>
-          <p:cNvPr id="6" name="Imagen 5">
-            <a:extLst>
-              <a:ext uri="{FF2B5EF4-FFF2-40B4-BE49-F238E27FC236}">
-                <a16:creationId xmlns:a16="http://schemas.microsoft.com/office/drawing/2014/main" id="{700E80C6-A097-74C2-D026-CDA6211EC408}"/>
-              </a:ext>
-            </a:extLst>
-          </p:cNvPr>
-          <p:cNvPicPr>
-            <a:picLocks noChangeAspect="1"/>
-          </p:cNvPicPr>
-          <p:nvPr/>
-        </p:nvPicPr>
-        <p:blipFill>
-          <a:blip r:embed="rId4"/>
-          <a:stretch>
-            <a:fillRect/>
-          </a:stretch>
-        </p:blipFill>
-        <p:spPr>
-          <a:xfrm>
-            <a:off x="5874026" y="1552428"/>
-            <a:ext cx="4521432" cy="3968954"/>
-          </a:xfrm>
-          <a:prstGeom prst="rect">
-            <a:avLst/>
-          </a:prstGeom>
-        </p:spPr>
-      </p:pic>
-    </p:spTree>
-    <p:extLst>
-      <p:ext uri="{BB962C8B-B14F-4D97-AF65-F5344CB8AC3E}">
-        <p14:creationId xmlns:p14="http://schemas.microsoft.com/office/powerpoint/2010/main" val="2021915272"/>
-      </p:ext>
-    </p:extLst>
-  </p:cSld>
-  <p:clrMapOvr>
-    <a:masterClrMapping/>
-  </p:clrMapOvr>
-</p:sld>
-</file>
-
-<file path=ppt/slides/slide11.xml><?xml version="1.0" encoding="utf-8"?>
-<p:sld xmlns:a="http://schemas.openxmlformats.org/drawingml/2006/main" xmlns:r="http://schemas.openxmlformats.org/officeDocument/2006/relationships" xmlns:p="http://schemas.openxmlformats.org/presentationml/2006/main">
-  <p:cSld>
-    <p:spTree>
-      <p:nvGrpSpPr>
-        <p:cNvPr id="1" name="">
-          <a:extLst>
-            <a:ext uri="{FF2B5EF4-FFF2-40B4-BE49-F238E27FC236}">
               <a16:creationId xmlns:a16="http://schemas.microsoft.com/office/drawing/2014/main" id="{90083112-6CE6-793F-0075-96E146781970}"/>
             </a:ext>
           </a:extLst>
@@ -6272,7 +5750,7 @@
 </p:sld>
 </file>
 
-<file path=ppt/slides/slide12.xml><?xml version="1.0" encoding="utf-8"?>
+<file path=ppt/slides/slide11.xml><?xml version="1.0" encoding="utf-8"?>
 <p:sld xmlns:a="http://schemas.openxmlformats.org/drawingml/2006/main" xmlns:r="http://schemas.openxmlformats.org/officeDocument/2006/relationships" xmlns:p="http://schemas.openxmlformats.org/presentationml/2006/main">
   <p:cSld>
     <p:spTree>
@@ -6718,7 +6196,7 @@
 </p:sld>
 </file>
 
-<file path=ppt/slides/slide13.xml><?xml version="1.0" encoding="utf-8"?>
+<file path=ppt/slides/slide12.xml><?xml version="1.0" encoding="utf-8"?>
 <p:sld xmlns:a="http://schemas.openxmlformats.org/drawingml/2006/main" xmlns:r="http://schemas.openxmlformats.org/officeDocument/2006/relationships" xmlns:p="http://schemas.openxmlformats.org/presentationml/2006/main">
   <p:cSld>
     <p:spTree>
@@ -7123,7 +6601,7 @@
 </p:sld>
 </file>
 
-<file path=ppt/slides/slide14.xml><?xml version="1.0" encoding="utf-8"?>
+<file path=ppt/slides/slide13.xml><?xml version="1.0" encoding="utf-8"?>
 <p:sld xmlns:a="http://schemas.openxmlformats.org/drawingml/2006/main" xmlns:r="http://schemas.openxmlformats.org/officeDocument/2006/relationships" xmlns:p="http://schemas.openxmlformats.org/presentationml/2006/main">
   <p:cSld>
     <p:spTree>
@@ -9399,432 +8877,6 @@
         <p:cNvPr id="1" name="">
           <a:extLst>
             <a:ext uri="{FF2B5EF4-FFF2-40B4-BE49-F238E27FC236}">
-              <a16:creationId xmlns:a16="http://schemas.microsoft.com/office/drawing/2014/main" id="{4A3D8517-2942-3552-11F7-505C6D57BD9D}"/>
-            </a:ext>
-          </a:extLst>
-        </p:cNvPr>
-        <p:cNvGrpSpPr/>
-        <p:nvPr/>
-      </p:nvGrpSpPr>
-      <p:grpSpPr>
-        <a:xfrm>
-          <a:off x="0" y="0"/>
-          <a:ext cx="0" cy="0"/>
-          <a:chOff x="0" y="0"/>
-          <a:chExt cx="0" cy="0"/>
-        </a:xfrm>
-      </p:grpSpPr>
-      <p:pic>
-        <p:nvPicPr>
-          <p:cNvPr id="4" name="Picture 2" descr="Duoc UC - Learn Chile">
-            <a:extLst>
-              <a:ext uri="{FF2B5EF4-FFF2-40B4-BE49-F238E27FC236}">
-                <a16:creationId xmlns:a16="http://schemas.microsoft.com/office/drawing/2014/main" id="{FA799DEA-9C8E-1AFA-5421-C14DE901EF93}"/>
-              </a:ext>
-            </a:extLst>
-          </p:cNvPr>
-          <p:cNvPicPr>
-            <a:picLocks noChangeAspect="1" noChangeArrowheads="1"/>
-          </p:cNvPicPr>
-          <p:nvPr/>
-        </p:nvPicPr>
-        <p:blipFill>
-          <a:blip r:embed="rId3">
-            <a:extLst>
-              <a:ext uri="{28A0092B-C50C-407E-A947-70E740481C1C}">
-                <a14:useLocalDpi xmlns:a14="http://schemas.microsoft.com/office/drawing/2010/main" val="0"/>
-              </a:ext>
-            </a:extLst>
-          </a:blip>
-          <a:srcRect/>
-          <a:stretch>
-            <a:fillRect/>
-          </a:stretch>
-        </p:blipFill>
-        <p:spPr bwMode="auto">
-          <a:xfrm>
-            <a:off x="11135913" y="30480"/>
-            <a:ext cx="974807" cy="825402"/>
-          </a:xfrm>
-          <a:prstGeom prst="rect">
-            <a:avLst/>
-          </a:prstGeom>
-          <a:noFill/>
-          <a:extLst>
-            <a:ext uri="{909E8E84-426E-40DD-AFC4-6F175D3DCCD1}">
-              <a14:hiddenFill xmlns:a14="http://schemas.microsoft.com/office/drawing/2010/main">
-                <a:solidFill>
-                  <a:srgbClr val="FFFFFF"/>
-                </a:solidFill>
-              </a14:hiddenFill>
-            </a:ext>
-          </a:extLst>
-        </p:spPr>
-      </p:pic>
-      <p:sp>
-        <p:nvSpPr>
-          <p:cNvPr id="2" name="Título 1">
-            <a:extLst>
-              <a:ext uri="{FF2B5EF4-FFF2-40B4-BE49-F238E27FC236}">
-                <a16:creationId xmlns:a16="http://schemas.microsoft.com/office/drawing/2014/main" id="{E41B13E6-1447-17F1-A557-73A70F438BB6}"/>
-              </a:ext>
-            </a:extLst>
-          </p:cNvPr>
-          <p:cNvSpPr txBox="1">
-            <a:spLocks/>
-          </p:cNvSpPr>
-          <p:nvPr/>
-        </p:nvSpPr>
-        <p:spPr>
-          <a:xfrm>
-            <a:off x="989606" y="284087"/>
-            <a:ext cx="9768840" cy="1325563"/>
-          </a:xfrm>
-          <a:prstGeom prst="rect">
-            <a:avLst/>
-          </a:prstGeom>
-        </p:spPr>
-        <p:txBody>
-          <a:bodyPr vert="horz" lIns="91440" tIns="45720" rIns="91440" bIns="45720" rtlCol="0" anchor="ctr">
-            <a:normAutofit/>
-          </a:bodyPr>
-          <a:lstStyle>
-            <a:lvl1pPr algn="l" defTabSz="914400" rtl="0" eaLnBrk="1" latinLnBrk="0" hangingPunct="1">
-              <a:lnSpc>
-                <a:spcPct val="90000"/>
-              </a:lnSpc>
-              <a:spcBef>
-                <a:spcPct val="0"/>
-              </a:spcBef>
-              <a:buNone/>
-              <a:defRPr sz="4400" kern="1200">
-                <a:solidFill>
-                  <a:schemeClr val="tx1"/>
-                </a:solidFill>
-                <a:latin typeface="+mj-lt"/>
-                <a:ea typeface="+mj-ea"/>
-                <a:cs typeface="+mj-cs"/>
-              </a:defRPr>
-            </a:lvl1pPr>
-          </a:lstStyle>
-          <a:p>
-            <a:endParaRPr lang="es-CL" sz="3200" i="1" dirty="0"/>
-          </a:p>
-        </p:txBody>
-      </p:sp>
-      <p:sp>
-        <p:nvSpPr>
-          <p:cNvPr id="7" name="Título 1">
-            <a:extLst>
-              <a:ext uri="{FF2B5EF4-FFF2-40B4-BE49-F238E27FC236}">
-                <a16:creationId xmlns:a16="http://schemas.microsoft.com/office/drawing/2014/main" id="{27D7019C-39B5-3E9F-0B36-7F161C30011D}"/>
-              </a:ext>
-            </a:extLst>
-          </p:cNvPr>
-          <p:cNvSpPr txBox="1">
-            <a:spLocks/>
-          </p:cNvSpPr>
-          <p:nvPr/>
-        </p:nvSpPr>
-        <p:spPr>
-          <a:xfrm>
-            <a:off x="431580" y="284086"/>
-            <a:ext cx="10515600" cy="1325563"/>
-          </a:xfrm>
-          <a:prstGeom prst="rect">
-            <a:avLst/>
-          </a:prstGeom>
-        </p:spPr>
-        <p:txBody>
-          <a:bodyPr vert="horz" lIns="91440" tIns="45720" rIns="91440" bIns="45720" rtlCol="0" anchor="ctr">
-            <a:normAutofit/>
-          </a:bodyPr>
-          <a:lstStyle>
-            <a:lvl1pPr algn="l" defTabSz="914400" rtl="0" eaLnBrk="1" latinLnBrk="0" hangingPunct="1">
-              <a:lnSpc>
-                <a:spcPct val="90000"/>
-              </a:lnSpc>
-              <a:spcBef>
-                <a:spcPct val="0"/>
-              </a:spcBef>
-              <a:buNone/>
-              <a:defRPr sz="4400" kern="1200">
-                <a:solidFill>
-                  <a:schemeClr val="tx1"/>
-                </a:solidFill>
-                <a:latin typeface="+mj-lt"/>
-                <a:ea typeface="+mj-ea"/>
-                <a:cs typeface="+mj-cs"/>
-              </a:defRPr>
-            </a:lvl1pPr>
-          </a:lstStyle>
-          <a:p>
-            <a:r>
-              <a:rPr lang="es-MX" b="1" i="1" dirty="0" err="1"/>
-              <a:t>LangChain</a:t>
-            </a:r>
-            <a:r>
-              <a:rPr lang="es-MX" b="1" i="1" dirty="0"/>
-              <a:t>:  </a:t>
-            </a:r>
-            <a:r>
-              <a:rPr lang="es-MX" i="1" dirty="0"/>
-              <a:t>Métodos</a:t>
-            </a:r>
-            <a:r>
-              <a:rPr lang="es-MX" b="1" i="1" dirty="0"/>
-              <a:t> </a:t>
-            </a:r>
-            <a:r>
-              <a:rPr lang="es-MX" i="1" dirty="0"/>
-              <a:t>de memoria en </a:t>
-            </a:r>
-            <a:r>
-              <a:rPr lang="es-MX" i="1" dirty="0" err="1"/>
-              <a:t>Langchain</a:t>
-            </a:r>
-            <a:r>
-              <a:rPr lang="es-MX" i="1" dirty="0"/>
-              <a:t>.</a:t>
-            </a:r>
-            <a:endParaRPr lang="es-CL" dirty="0"/>
-          </a:p>
-        </p:txBody>
-      </p:sp>
-      <p:sp>
-        <p:nvSpPr>
-          <p:cNvPr id="9" name="Título 1">
-            <a:extLst>
-              <a:ext uri="{FF2B5EF4-FFF2-40B4-BE49-F238E27FC236}">
-                <a16:creationId xmlns:a16="http://schemas.microsoft.com/office/drawing/2014/main" id="{42B15B91-2198-887E-91BE-1969AA875E3D}"/>
-              </a:ext>
-            </a:extLst>
-          </p:cNvPr>
-          <p:cNvSpPr txBox="1">
-            <a:spLocks/>
-          </p:cNvSpPr>
-          <p:nvPr/>
-        </p:nvSpPr>
-        <p:spPr>
-          <a:xfrm>
-            <a:off x="8170535" y="3249774"/>
-            <a:ext cx="3940185" cy="2803696"/>
-          </a:xfrm>
-          <a:prstGeom prst="rect">
-            <a:avLst/>
-          </a:prstGeom>
-        </p:spPr>
-        <p:txBody>
-          <a:bodyPr vert="horz" lIns="91440" tIns="45720" rIns="91440" bIns="45720" rtlCol="0" anchor="ctr">
-            <a:normAutofit/>
-          </a:bodyPr>
-          <a:lstStyle>
-            <a:lvl1pPr algn="l" defTabSz="914400" rtl="0" eaLnBrk="1" latinLnBrk="0" hangingPunct="1">
-              <a:lnSpc>
-                <a:spcPct val="90000"/>
-              </a:lnSpc>
-              <a:spcBef>
-                <a:spcPct val="0"/>
-              </a:spcBef>
-              <a:buNone/>
-              <a:defRPr sz="4400" kern="1200">
-                <a:solidFill>
-                  <a:schemeClr val="tx1"/>
-                </a:solidFill>
-                <a:latin typeface="+mj-lt"/>
-                <a:ea typeface="+mj-ea"/>
-                <a:cs typeface="+mj-cs"/>
-              </a:defRPr>
-            </a:lvl1pPr>
-          </a:lstStyle>
-          <a:p>
-            <a:pPr algn="ctr"/>
-            <a:endParaRPr lang="es-MX" i="1" dirty="0"/>
-          </a:p>
-        </p:txBody>
-      </p:sp>
-      <p:sp>
-        <p:nvSpPr>
-          <p:cNvPr id="3" name="Título 1">
-            <a:extLst>
-              <a:ext uri="{FF2B5EF4-FFF2-40B4-BE49-F238E27FC236}">
-                <a16:creationId xmlns:a16="http://schemas.microsoft.com/office/drawing/2014/main" id="{1EF42E6C-EAC7-8564-EE83-C545E6071AC4}"/>
-              </a:ext>
-            </a:extLst>
-          </p:cNvPr>
-          <p:cNvSpPr txBox="1">
-            <a:spLocks/>
-          </p:cNvSpPr>
-          <p:nvPr/>
-        </p:nvSpPr>
-        <p:spPr>
-          <a:xfrm>
-            <a:off x="307756" y="1609650"/>
-            <a:ext cx="5506388" cy="3702275"/>
-          </a:xfrm>
-          <a:prstGeom prst="rect">
-            <a:avLst/>
-          </a:prstGeom>
-        </p:spPr>
-        <p:txBody>
-          <a:bodyPr vert="horz" lIns="91440" tIns="45720" rIns="91440" bIns="45720" rtlCol="0" anchor="ctr">
-            <a:normAutofit fontScale="70000" lnSpcReduction="20000"/>
-          </a:bodyPr>
-          <a:lstStyle>
-            <a:lvl1pPr algn="l" defTabSz="914400" rtl="0" eaLnBrk="1" latinLnBrk="0" hangingPunct="1">
-              <a:lnSpc>
-                <a:spcPct val="90000"/>
-              </a:lnSpc>
-              <a:spcBef>
-                <a:spcPct val="0"/>
-              </a:spcBef>
-              <a:buNone/>
-              <a:defRPr sz="4400" kern="1200">
-                <a:solidFill>
-                  <a:schemeClr val="tx1"/>
-                </a:solidFill>
-                <a:latin typeface="+mj-lt"/>
-                <a:ea typeface="+mj-ea"/>
-                <a:cs typeface="+mj-cs"/>
-              </a:defRPr>
-            </a:lvl1pPr>
-          </a:lstStyle>
-          <a:p>
-            <a:endParaRPr lang="es-CL" dirty="0"/>
-          </a:p>
-          <a:p>
-            <a:endParaRPr lang="es-CL" dirty="0"/>
-          </a:p>
-          <a:p>
-            <a:pPr>
-              <a:lnSpc>
-                <a:spcPct val="110000"/>
-              </a:lnSpc>
-            </a:pPr>
-            <a:r>
-              <a:rPr lang="es-CL" sz="3200" b="1" dirty="0" err="1"/>
-              <a:t>ConversationBufferMemory</a:t>
-            </a:r>
-            <a:r>
-              <a:rPr lang="es-CL" b="1" dirty="0"/>
-              <a:t>: </a:t>
-            </a:r>
-            <a:r>
-              <a:rPr lang="es-CL" sz="3200" i="1" dirty="0"/>
-              <a:t>Guarda toda la conversación.</a:t>
-            </a:r>
-          </a:p>
-          <a:p>
-            <a:endParaRPr lang="es-CL" dirty="0"/>
-          </a:p>
-          <a:p>
-            <a:pPr>
-              <a:lnSpc>
-                <a:spcPct val="110000"/>
-              </a:lnSpc>
-            </a:pPr>
-            <a:r>
-              <a:rPr lang="es-CL" sz="3200" b="1" dirty="0" err="1"/>
-              <a:t>ConversationBufferWindowMemory</a:t>
-            </a:r>
-            <a:r>
-              <a:rPr lang="es-CL" sz="3200" b="1" dirty="0"/>
-              <a:t>: </a:t>
-            </a:r>
-          </a:p>
-          <a:p>
-            <a:pPr>
-              <a:lnSpc>
-                <a:spcPct val="110000"/>
-              </a:lnSpc>
-            </a:pPr>
-            <a:r>
-              <a:rPr lang="es-CL" sz="3200" i="1" dirty="0"/>
-              <a:t>Guarda las últimas N interacciones</a:t>
-            </a:r>
-            <a:r>
-              <a:rPr lang="es-CL" i="1" dirty="0"/>
-              <a:t>.</a:t>
-            </a:r>
-          </a:p>
-          <a:p>
-            <a:endParaRPr lang="es-CL" dirty="0"/>
-          </a:p>
-          <a:p>
-            <a:pPr>
-              <a:lnSpc>
-                <a:spcPct val="110000"/>
-              </a:lnSpc>
-            </a:pPr>
-            <a:r>
-              <a:rPr lang="es-MX" sz="3100" b="1" dirty="0" err="1"/>
-              <a:t>ConversationSummaryMemory</a:t>
-            </a:r>
-            <a:r>
-              <a:rPr lang="es-MX" sz="3100" b="1" dirty="0"/>
-              <a:t>: </a:t>
-            </a:r>
-            <a:r>
-              <a:rPr lang="es-MX" sz="3200" i="1" dirty="0"/>
-              <a:t>Resume la conversación para ahorrar tokens.</a:t>
-            </a:r>
-          </a:p>
-          <a:p>
-            <a:endParaRPr lang="es-CL" dirty="0"/>
-          </a:p>
-        </p:txBody>
-      </p:sp>
-      <p:pic>
-        <p:nvPicPr>
-          <p:cNvPr id="13" name="Imagen 12">
-            <a:extLst>
-              <a:ext uri="{FF2B5EF4-FFF2-40B4-BE49-F238E27FC236}">
-                <a16:creationId xmlns:a16="http://schemas.microsoft.com/office/drawing/2014/main" id="{D2E600BA-616C-A089-C5F7-37F04F72B6A2}"/>
-              </a:ext>
-            </a:extLst>
-          </p:cNvPr>
-          <p:cNvPicPr>
-            <a:picLocks noChangeAspect="1"/>
-          </p:cNvPicPr>
-          <p:nvPr/>
-        </p:nvPicPr>
-        <p:blipFill>
-          <a:blip r:embed="rId4"/>
-          <a:stretch>
-            <a:fillRect/>
-          </a:stretch>
-        </p:blipFill>
-        <p:spPr>
-          <a:xfrm>
-            <a:off x="6002877" y="1797968"/>
-            <a:ext cx="5757543" cy="3638700"/>
-          </a:xfrm>
-          <a:prstGeom prst="rect">
-            <a:avLst/>
-          </a:prstGeom>
-        </p:spPr>
-      </p:pic>
-    </p:spTree>
-    <p:extLst>
-      <p:ext uri="{BB962C8B-B14F-4D97-AF65-F5344CB8AC3E}">
-        <p14:creationId xmlns:p14="http://schemas.microsoft.com/office/powerpoint/2010/main" val="2342809517"/>
-      </p:ext>
-    </p:extLst>
-  </p:cSld>
-  <p:clrMapOvr>
-    <a:masterClrMapping/>
-  </p:clrMapOvr>
-</p:sld>
-</file>
-
-<file path=ppt/slides/slide7.xml><?xml version="1.0" encoding="utf-8"?>
-<p:sld xmlns:a="http://schemas.openxmlformats.org/drawingml/2006/main" xmlns:r="http://schemas.openxmlformats.org/officeDocument/2006/relationships" xmlns:p="http://schemas.openxmlformats.org/presentationml/2006/main">
-  <p:cSld>
-    <p:spTree>
-      <p:nvGrpSpPr>
-        <p:cNvPr id="1" name="">
-          <a:extLst>
-            <a:ext uri="{FF2B5EF4-FFF2-40B4-BE49-F238E27FC236}">
               <a16:creationId xmlns:a16="http://schemas.microsoft.com/office/drawing/2014/main" id="{1A570E46-2870-2FA1-DA27-EEE6F2126BDB}"/>
             </a:ext>
           </a:extLst>
@@ -10226,7 +9278,7 @@
 </p:sld>
 </file>
 
-<file path=ppt/slides/slide8.xml><?xml version="1.0" encoding="utf-8"?>
+<file path=ppt/slides/slide7.xml><?xml version="1.0" encoding="utf-8"?>
 <p:sld xmlns:a="http://schemas.openxmlformats.org/drawingml/2006/main" xmlns:r="http://schemas.openxmlformats.org/officeDocument/2006/relationships" xmlns:p="http://schemas.openxmlformats.org/presentationml/2006/main">
   <p:cSld>
     <p:spTree>
@@ -10600,7 +9652,7 @@
 </p:sld>
 </file>
 
-<file path=ppt/slides/slide9.xml><?xml version="1.0" encoding="utf-8"?>
+<file path=ppt/slides/slide8.xml><?xml version="1.0" encoding="utf-8"?>
 <p:sld xmlns:a="http://schemas.openxmlformats.org/drawingml/2006/main" xmlns:r="http://schemas.openxmlformats.org/officeDocument/2006/relationships" xmlns:p="http://schemas.openxmlformats.org/presentationml/2006/main">
   <p:cSld>
     <p:spTree>
@@ -10985,6 +10037,412 @@
     <p:extLst>
       <p:ext uri="{BB962C8B-B14F-4D97-AF65-F5344CB8AC3E}">
         <p14:creationId xmlns:p14="http://schemas.microsoft.com/office/powerpoint/2010/main" val="980311529"/>
+      </p:ext>
+    </p:extLst>
+  </p:cSld>
+  <p:clrMapOvr>
+    <a:masterClrMapping/>
+  </p:clrMapOvr>
+</p:sld>
+</file>
+
+<file path=ppt/slides/slide9.xml><?xml version="1.0" encoding="utf-8"?>
+<p:sld xmlns:a="http://schemas.openxmlformats.org/drawingml/2006/main" xmlns:r="http://schemas.openxmlformats.org/officeDocument/2006/relationships" xmlns:p="http://schemas.openxmlformats.org/presentationml/2006/main">
+  <p:cSld>
+    <p:spTree>
+      <p:nvGrpSpPr>
+        <p:cNvPr id="1" name="">
+          <a:extLst>
+            <a:ext uri="{FF2B5EF4-FFF2-40B4-BE49-F238E27FC236}">
+              <a16:creationId xmlns:a16="http://schemas.microsoft.com/office/drawing/2014/main" id="{7EDACDB2-0715-D0C9-E196-76271EA91E60}"/>
+            </a:ext>
+          </a:extLst>
+        </p:cNvPr>
+        <p:cNvGrpSpPr/>
+        <p:nvPr/>
+      </p:nvGrpSpPr>
+      <p:grpSpPr>
+        <a:xfrm>
+          <a:off x="0" y="0"/>
+          <a:ext cx="0" cy="0"/>
+          <a:chOff x="0" y="0"/>
+          <a:chExt cx="0" cy="0"/>
+        </a:xfrm>
+      </p:grpSpPr>
+      <p:pic>
+        <p:nvPicPr>
+          <p:cNvPr id="4" name="Picture 2" descr="Duoc UC - Learn Chile">
+            <a:extLst>
+              <a:ext uri="{FF2B5EF4-FFF2-40B4-BE49-F238E27FC236}">
+                <a16:creationId xmlns:a16="http://schemas.microsoft.com/office/drawing/2014/main" id="{5100A106-BEF5-89F1-E6D9-15F9911808F9}"/>
+              </a:ext>
+            </a:extLst>
+          </p:cNvPr>
+          <p:cNvPicPr>
+            <a:picLocks noChangeAspect="1" noChangeArrowheads="1"/>
+          </p:cNvPicPr>
+          <p:nvPr/>
+        </p:nvPicPr>
+        <p:blipFill>
+          <a:blip r:embed="rId3">
+            <a:extLst>
+              <a:ext uri="{28A0092B-C50C-407E-A947-70E740481C1C}">
+                <a14:useLocalDpi xmlns:a14="http://schemas.microsoft.com/office/drawing/2010/main" val="0"/>
+              </a:ext>
+            </a:extLst>
+          </a:blip>
+          <a:srcRect/>
+          <a:stretch>
+            <a:fillRect/>
+          </a:stretch>
+        </p:blipFill>
+        <p:spPr bwMode="auto">
+          <a:xfrm>
+            <a:off x="11135913" y="30480"/>
+            <a:ext cx="974807" cy="825402"/>
+          </a:xfrm>
+          <a:prstGeom prst="rect">
+            <a:avLst/>
+          </a:prstGeom>
+          <a:noFill/>
+          <a:extLst>
+            <a:ext uri="{909E8E84-426E-40DD-AFC4-6F175D3DCCD1}">
+              <a14:hiddenFill xmlns:a14="http://schemas.microsoft.com/office/drawing/2010/main">
+                <a:solidFill>
+                  <a:srgbClr val="FFFFFF"/>
+                </a:solidFill>
+              </a14:hiddenFill>
+            </a:ext>
+          </a:extLst>
+        </p:spPr>
+      </p:pic>
+      <p:sp>
+        <p:nvSpPr>
+          <p:cNvPr id="2" name="Título 1">
+            <a:extLst>
+              <a:ext uri="{FF2B5EF4-FFF2-40B4-BE49-F238E27FC236}">
+                <a16:creationId xmlns:a16="http://schemas.microsoft.com/office/drawing/2014/main" id="{1D8B0CF6-DF6E-A854-3976-A864470831FE}"/>
+              </a:ext>
+            </a:extLst>
+          </p:cNvPr>
+          <p:cNvSpPr txBox="1">
+            <a:spLocks/>
+          </p:cNvSpPr>
+          <p:nvPr/>
+        </p:nvSpPr>
+        <p:spPr>
+          <a:xfrm>
+            <a:off x="989606" y="284087"/>
+            <a:ext cx="9768840" cy="1325563"/>
+          </a:xfrm>
+          <a:prstGeom prst="rect">
+            <a:avLst/>
+          </a:prstGeom>
+        </p:spPr>
+        <p:txBody>
+          <a:bodyPr vert="horz" lIns="91440" tIns="45720" rIns="91440" bIns="45720" rtlCol="0" anchor="ctr">
+            <a:normAutofit/>
+          </a:bodyPr>
+          <a:lstStyle>
+            <a:lvl1pPr algn="l" defTabSz="914400" rtl="0" eaLnBrk="1" latinLnBrk="0" hangingPunct="1">
+              <a:lnSpc>
+                <a:spcPct val="90000"/>
+              </a:lnSpc>
+              <a:spcBef>
+                <a:spcPct val="0"/>
+              </a:spcBef>
+              <a:buNone/>
+              <a:defRPr sz="4400" kern="1200">
+                <a:solidFill>
+                  <a:schemeClr val="tx1"/>
+                </a:solidFill>
+                <a:latin typeface="+mj-lt"/>
+                <a:ea typeface="+mj-ea"/>
+                <a:cs typeface="+mj-cs"/>
+              </a:defRPr>
+            </a:lvl1pPr>
+          </a:lstStyle>
+          <a:p>
+            <a:endParaRPr lang="es-CL" sz="3200" i="1" dirty="0"/>
+          </a:p>
+        </p:txBody>
+      </p:sp>
+      <p:sp>
+        <p:nvSpPr>
+          <p:cNvPr id="7" name="Título 1">
+            <a:extLst>
+              <a:ext uri="{FF2B5EF4-FFF2-40B4-BE49-F238E27FC236}">
+                <a16:creationId xmlns:a16="http://schemas.microsoft.com/office/drawing/2014/main" id="{08CF7494-419A-F5DB-DF38-B76C920C90A9}"/>
+              </a:ext>
+            </a:extLst>
+          </p:cNvPr>
+          <p:cNvSpPr txBox="1">
+            <a:spLocks/>
+          </p:cNvSpPr>
+          <p:nvPr/>
+        </p:nvSpPr>
+        <p:spPr>
+          <a:xfrm>
+            <a:off x="431580" y="95769"/>
+            <a:ext cx="10515600" cy="1325563"/>
+          </a:xfrm>
+          <a:prstGeom prst="rect">
+            <a:avLst/>
+          </a:prstGeom>
+        </p:spPr>
+        <p:txBody>
+          <a:bodyPr vert="horz" lIns="91440" tIns="45720" rIns="91440" bIns="45720" rtlCol="0" anchor="ctr">
+            <a:normAutofit/>
+          </a:bodyPr>
+          <a:lstStyle>
+            <a:lvl1pPr algn="l" defTabSz="914400" rtl="0" eaLnBrk="1" latinLnBrk="0" hangingPunct="1">
+              <a:lnSpc>
+                <a:spcPct val="90000"/>
+              </a:lnSpc>
+              <a:spcBef>
+                <a:spcPct val="0"/>
+              </a:spcBef>
+              <a:buNone/>
+              <a:defRPr sz="4400" kern="1200">
+                <a:solidFill>
+                  <a:schemeClr val="tx1"/>
+                </a:solidFill>
+                <a:latin typeface="+mj-lt"/>
+                <a:ea typeface="+mj-ea"/>
+                <a:cs typeface="+mj-cs"/>
+              </a:defRPr>
+            </a:lvl1pPr>
+          </a:lstStyle>
+          <a:p>
+            <a:r>
+              <a:rPr lang="es-CL" b="1" i="1" dirty="0"/>
+              <a:t>Procedural</a:t>
+            </a:r>
+            <a:r>
+              <a:rPr lang="es-MX" b="1" i="1" dirty="0"/>
+              <a:t>: </a:t>
+            </a:r>
+            <a:r>
+              <a:rPr lang="es-MX" i="1" dirty="0"/>
+              <a:t>Ejecutar acciones o habilidades</a:t>
+            </a:r>
+            <a:r>
+              <a:rPr lang="es-MX" b="1" i="1" dirty="0"/>
+              <a:t>.</a:t>
+            </a:r>
+            <a:endParaRPr lang="es-CL" i="1" dirty="0"/>
+          </a:p>
+        </p:txBody>
+      </p:sp>
+      <p:sp>
+        <p:nvSpPr>
+          <p:cNvPr id="9" name="Título 1">
+            <a:extLst>
+              <a:ext uri="{FF2B5EF4-FFF2-40B4-BE49-F238E27FC236}">
+                <a16:creationId xmlns:a16="http://schemas.microsoft.com/office/drawing/2014/main" id="{2057300D-F732-FA3D-19FB-FA79E6E7FC74}"/>
+              </a:ext>
+            </a:extLst>
+          </p:cNvPr>
+          <p:cNvSpPr txBox="1">
+            <a:spLocks/>
+          </p:cNvSpPr>
+          <p:nvPr/>
+        </p:nvSpPr>
+        <p:spPr>
+          <a:xfrm>
+            <a:off x="8170535" y="3249774"/>
+            <a:ext cx="3940185" cy="2803696"/>
+          </a:xfrm>
+          <a:prstGeom prst="rect">
+            <a:avLst/>
+          </a:prstGeom>
+        </p:spPr>
+        <p:txBody>
+          <a:bodyPr vert="horz" lIns="91440" tIns="45720" rIns="91440" bIns="45720" rtlCol="0" anchor="ctr">
+            <a:normAutofit/>
+          </a:bodyPr>
+          <a:lstStyle>
+            <a:lvl1pPr algn="l" defTabSz="914400" rtl="0" eaLnBrk="1" latinLnBrk="0" hangingPunct="1">
+              <a:lnSpc>
+                <a:spcPct val="90000"/>
+              </a:lnSpc>
+              <a:spcBef>
+                <a:spcPct val="0"/>
+              </a:spcBef>
+              <a:buNone/>
+              <a:defRPr sz="4400" kern="1200">
+                <a:solidFill>
+                  <a:schemeClr val="tx1"/>
+                </a:solidFill>
+                <a:latin typeface="+mj-lt"/>
+                <a:ea typeface="+mj-ea"/>
+                <a:cs typeface="+mj-cs"/>
+              </a:defRPr>
+            </a:lvl1pPr>
+          </a:lstStyle>
+          <a:p>
+            <a:pPr algn="ctr"/>
+            <a:endParaRPr lang="es-MX" i="1" dirty="0"/>
+          </a:p>
+        </p:txBody>
+      </p:sp>
+      <p:sp>
+        <p:nvSpPr>
+          <p:cNvPr id="10" name="CuadroTexto 9">
+            <a:extLst>
+              <a:ext uri="{FF2B5EF4-FFF2-40B4-BE49-F238E27FC236}">
+                <a16:creationId xmlns:a16="http://schemas.microsoft.com/office/drawing/2014/main" id="{BC00C1A3-9649-2EB8-229E-2EE2444EAAED}"/>
+              </a:ext>
+            </a:extLst>
+          </p:cNvPr>
+          <p:cNvSpPr txBox="1"/>
+          <p:nvPr/>
+        </p:nvSpPr>
+        <p:spPr>
+          <a:xfrm>
+            <a:off x="431580" y="1518802"/>
+            <a:ext cx="5548978" cy="4093428"/>
+          </a:xfrm>
+          <a:prstGeom prst="rect">
+            <a:avLst/>
+          </a:prstGeom>
+          <a:noFill/>
+        </p:spPr>
+        <p:txBody>
+          <a:bodyPr wrap="square">
+            <a:spAutoFit/>
+          </a:bodyPr>
+          <a:lstStyle/>
+          <a:p>
+            <a:r>
+              <a:rPr lang="es-MX" sz="2000" i="1" dirty="0">
+                <a:latin typeface="+mj-lt"/>
+              </a:rPr>
+              <a:t>Son las reglas utilizadas para realizar tareas. En los humanos, la memoria procedimental es como el conocimiento interiorizado de cómo ejecutar acciones, como montar en bicicleta mediante habilidades motoras básicas y equilibrio. La memoria episódica, en cambio, implica recordar experiencias específicas, como la primera vez que se montó en bicicleta sin </a:t>
+            </a:r>
+            <a:r>
+              <a:rPr lang="es-MX" sz="2000" i="1" dirty="0" err="1">
+                <a:latin typeface="+mj-lt"/>
+              </a:rPr>
+              <a:t>ruedines</a:t>
+            </a:r>
+            <a:r>
+              <a:rPr lang="es-MX" sz="2000" i="1" dirty="0">
+                <a:latin typeface="+mj-lt"/>
+              </a:rPr>
+              <a:t> o un paseo memorable por una ruta pintoresca. En el caso de los agentes de IA, la memoria procedimental es una combinación de los pesos del modelo, el código del agente y el </a:t>
+            </a:r>
+            <a:r>
+              <a:rPr lang="es-MX" sz="2000" i="1" dirty="0" err="1">
+                <a:latin typeface="+mj-lt"/>
+              </a:rPr>
+              <a:t>prompt</a:t>
+            </a:r>
+            <a:r>
+              <a:rPr lang="es-MX" sz="2000" i="1" dirty="0">
+                <a:latin typeface="+mj-lt"/>
+              </a:rPr>
+              <a:t> del agente, que en conjunto determinan la funcionalidad del agente.</a:t>
+            </a:r>
+            <a:endParaRPr lang="es-CL" sz="2000" i="1" dirty="0">
+              <a:latin typeface="+mj-lt"/>
+            </a:endParaRPr>
+          </a:p>
+        </p:txBody>
+      </p:sp>
+      <p:sp>
+        <p:nvSpPr>
+          <p:cNvPr id="11" name="Título 1">
+            <a:extLst>
+              <a:ext uri="{FF2B5EF4-FFF2-40B4-BE49-F238E27FC236}">
+                <a16:creationId xmlns:a16="http://schemas.microsoft.com/office/drawing/2014/main" id="{3E3ECE98-2E3B-38D2-129C-552BF7766BA2}"/>
+              </a:ext>
+            </a:extLst>
+          </p:cNvPr>
+          <p:cNvSpPr txBox="1">
+            <a:spLocks/>
+          </p:cNvSpPr>
+          <p:nvPr/>
+        </p:nvSpPr>
+        <p:spPr>
+          <a:xfrm>
+            <a:off x="-904099" y="6308112"/>
+            <a:ext cx="7549374" cy="454119"/>
+          </a:xfrm>
+          <a:prstGeom prst="rect">
+            <a:avLst/>
+          </a:prstGeom>
+        </p:spPr>
+        <p:txBody>
+          <a:bodyPr vert="horz" lIns="91440" tIns="45720" rIns="91440" bIns="45720" rtlCol="0" anchor="ctr">
+            <a:normAutofit/>
+          </a:bodyPr>
+          <a:lstStyle>
+            <a:lvl1pPr algn="l" defTabSz="914400" rtl="0" eaLnBrk="1" latinLnBrk="0" hangingPunct="1">
+              <a:lnSpc>
+                <a:spcPct val="90000"/>
+              </a:lnSpc>
+              <a:spcBef>
+                <a:spcPct val="0"/>
+              </a:spcBef>
+              <a:buNone/>
+              <a:defRPr sz="4400" kern="1200">
+                <a:solidFill>
+                  <a:schemeClr val="tx1"/>
+                </a:solidFill>
+                <a:latin typeface="+mj-lt"/>
+                <a:ea typeface="+mj-ea"/>
+                <a:cs typeface="+mj-cs"/>
+              </a:defRPr>
+            </a:lvl1pPr>
+          </a:lstStyle>
+          <a:p>
+            <a:pPr algn="ctr"/>
+            <a:r>
+              <a:rPr lang="es-MX" sz="1600" b="1" i="1" dirty="0"/>
+              <a:t>Nota: </a:t>
+            </a:r>
+            <a:r>
+              <a:rPr lang="es-CL" sz="1600" i="1" dirty="0"/>
+              <a:t>https://docs.langchain.com/oss/python/langgraph/memory</a:t>
+            </a:r>
+          </a:p>
+        </p:txBody>
+      </p:sp>
+      <p:pic>
+        <p:nvPicPr>
+          <p:cNvPr id="6" name="Imagen 5">
+            <a:extLst>
+              <a:ext uri="{FF2B5EF4-FFF2-40B4-BE49-F238E27FC236}">
+                <a16:creationId xmlns:a16="http://schemas.microsoft.com/office/drawing/2014/main" id="{700E80C6-A097-74C2-D026-CDA6211EC408}"/>
+              </a:ext>
+            </a:extLst>
+          </p:cNvPr>
+          <p:cNvPicPr>
+            <a:picLocks noChangeAspect="1"/>
+          </p:cNvPicPr>
+          <p:nvPr/>
+        </p:nvPicPr>
+        <p:blipFill>
+          <a:blip r:embed="rId4"/>
+          <a:stretch>
+            <a:fillRect/>
+          </a:stretch>
+        </p:blipFill>
+        <p:spPr>
+          <a:xfrm>
+            <a:off x="5874026" y="1552428"/>
+            <a:ext cx="4521432" cy="3968954"/>
+          </a:xfrm>
+          <a:prstGeom prst="rect">
+            <a:avLst/>
+          </a:prstGeom>
+        </p:spPr>
+      </p:pic>
+    </p:spTree>
+    <p:extLst>
+      <p:ext uri="{BB962C8B-B14F-4D97-AF65-F5344CB8AC3E}">
+        <p14:creationId xmlns:p14="http://schemas.microsoft.com/office/powerpoint/2010/main" val="2021915272"/>
       </p:ext>
     </p:extLst>
   </p:cSld>
